--- a/docs/submission/Pagemi_Official_Template_Working_Draft.pptx
+++ b/docs/submission/Pagemi_Official_Template_Working_Draft.pptx
@@ -10329,7 +10329,7 @@
                 <a:ea typeface="Arial"/>
                 <a:cs typeface="Arial"/>
               </a:rPr>
-              <a:t>https://merchreflex-927668522599.asia-southeast1.run.app</a:t>
+              <a:t>https://pagemi.joeyzhao.cc</a:t>
             </a:r>
           </a:p>
           <a:p xmlns:a="http://schemas.openxmlformats.org/drawingml/2006/main">
